--- a/dist/초4/국어/언어문학매체/초4_국어_언어문학매체_01_문장의기본짜임.pptx
+++ b/dist/초4/국어/언어문학매체/초4_국어_언어문학매체_01_문장의기본짜임.pptx
@@ -120,13 +120,13 @@
   <p:extLst>
     <p:ext uri="{521415D9-36F7-43E2-AB2F-B90AF26B5E84}">
       <p14:sectionLst xmlns:p14="http://schemas.microsoft.com/office/powerpoint/2010/main">
-        <p14:section name="도입" id="{9cdf3e78-4c72-9fb2-7a14-8252f534a70e}">
+        <p14:section name="도입" id="{0ee4b802-fdf0-e610-62aa-26cfc354040c}">
           <p14:sldIdLst>
             <p14:sldId id="256"/>
             <p14:sldId id="257"/>
           </p14:sldIdLst>
         </p14:section>
-        <p14:section name="개념" id="{d3729b7d-38a6-e9f8-b693-12b247223af5}">
+        <p14:section name="개념" id="{1b2dcab8-5d6c-b109-5ba5-220956aa78d8}">
           <p14:sldIdLst>
             <p14:sldId id="258"/>
             <p14:sldId id="259"/>
@@ -134,26 +134,26 @@
             <p14:sldId id="261"/>
           </p14:sldIdLst>
         </p14:section>
-        <p14:section name="연습" id="{eb559525-a1fe-9085-c239-caddd2c669c0}">
+        <p14:section name="연습" id="{1650bc62-6ddd-0d2c-0646-fca8bf83c1c5}">
           <p14:sldIdLst>
             <p14:sldId id="262"/>
             <p14:sldId id="263"/>
             <p14:sldId id="264"/>
           </p14:sldIdLst>
         </p14:section>
-        <p14:section name="확인" id="{34c68ea9-0014-34e1-47b7-67e130a4bb24}">
+        <p14:section name="확인" id="{ae2d3fd5-601a-2b20-9f65-f72da87eb4f1}">
           <p14:sldIdLst>
             <p14:sldId id="265"/>
             <p14:sldId id="266"/>
             <p14:sldId id="267"/>
           </p14:sldIdLst>
         </p14:section>
-        <p14:section name="정리" id="{e6c487a3-1a44-5fc6-db90-c7325f9d8d70}">
+        <p14:section name="정리" id="{9ca68591-4bb9-5e4e-0e2a-a0ccac2a48f8}">
           <p14:sldIdLst>
             <p14:sldId id="268"/>
           </p14:sldIdLst>
         </p14:section>
-        <p14:section name="보충" id="{a0ee7209-ea4a-55db-1a90-6a8192524d97}">
+        <p14:section name="보충" id="{833cdae5-202f-8206-fcff-3d30b19e5faf}">
           <p14:sldIdLst>
             <p14:sldId id="269"/>
           </p14:sldIdLst>
@@ -7552,7 +7552,7 @@
           </p:nvPr>
         </p:nvGraphicFramePr>
         <p:xfrm>
-          <a:off x="836676" y="2798445"/>
+          <a:off x="836676" y="2797302"/>
           <a:ext cx="10515600" cy="914400"/>
         </p:xfrm>
         <a:graphic>
@@ -7564,7 +7564,7 @@
                 <a:gridCol w="4732020"/>
                 <a:gridCol w="2628900"/>
               </a:tblGrid>
-              <a:tr h="511810">
+              <a:tr h="512572">
                 <a:tc>
                   <a:txBody>
                     <a:bodyPr/>
@@ -7770,7 +7770,7 @@
                   </a:tcPr>
                 </a:tc>
               </a:tr>
-              <a:tr h="511810">
+              <a:tr h="512572">
                 <a:tc>
                   <a:txBody>
                     <a:bodyPr/>
@@ -7976,7 +7976,7 @@
                   </a:tcPr>
                 </a:tc>
               </a:tr>
-              <a:tr h="511810">
+              <a:tr h="512572">
                 <a:tc>
                   <a:txBody>
                     <a:bodyPr/>

--- a/dist/초4/국어/언어문학매체/초4_국어_언어문학매체_01_문장의기본짜임.pptx
+++ b/dist/초4/국어/언어문학매체/초4_국어_언어문학매체_01_문장의기본짜임.pptx
@@ -120,13 +120,13 @@
   <p:extLst>
     <p:ext uri="{521415D9-36F7-43E2-AB2F-B90AF26B5E84}">
       <p14:sectionLst xmlns:p14="http://schemas.microsoft.com/office/powerpoint/2010/main">
-        <p14:section name="도입" id="{0ee4b802-fdf0-e610-62aa-26cfc354040c}">
+        <p14:section name="도입" id="{7ca4035f-51ae-e251-5fa2-7bb3f8d26755}">
           <p14:sldIdLst>
             <p14:sldId id="256"/>
             <p14:sldId id="257"/>
           </p14:sldIdLst>
         </p14:section>
-        <p14:section name="개념" id="{1b2dcab8-5d6c-b109-5ba5-220956aa78d8}">
+        <p14:section name="개념" id="{b51a7ea7-3429-38f0-4fac-646fa70ad1ff}">
           <p14:sldIdLst>
             <p14:sldId id="258"/>
             <p14:sldId id="259"/>
@@ -134,26 +134,26 @@
             <p14:sldId id="261"/>
           </p14:sldIdLst>
         </p14:section>
-        <p14:section name="연습" id="{1650bc62-6ddd-0d2c-0646-fca8bf83c1c5}">
+        <p14:section name="연습" id="{19040419-9822-94c2-cea6-d2987f36b2f7}">
           <p14:sldIdLst>
             <p14:sldId id="262"/>
             <p14:sldId id="263"/>
             <p14:sldId id="264"/>
           </p14:sldIdLst>
         </p14:section>
-        <p14:section name="확인" id="{ae2d3fd5-601a-2b20-9f65-f72da87eb4f1}">
+        <p14:section name="확인" id="{e6bd4dcc-edb3-5692-c55a-6f5577771108}">
           <p14:sldIdLst>
             <p14:sldId id="265"/>
             <p14:sldId id="266"/>
             <p14:sldId id="267"/>
           </p14:sldIdLst>
         </p14:section>
-        <p14:section name="정리" id="{9ca68591-4bb9-5e4e-0e2a-a0ccac2a48f8}">
+        <p14:section name="정리" id="{04c920dd-4877-ece8-07c4-b0cffec928ea}">
           <p14:sldIdLst>
             <p14:sldId id="268"/>
           </p14:sldIdLst>
         </p14:section>
-        <p14:section name="보충" id="{833cdae5-202f-8206-fcff-3d30b19e5faf}">
+        <p14:section name="보충" id="{add932a6-7570-532a-9a9e-351cf2f40e81}">
           <p14:sldIdLst>
             <p14:sldId id="269"/>
           </p14:sldIdLst>
@@ -1167,7 +1167,7 @@
             <a:r>
               <a:rPr lang="en-US" dirty="0"/>
               <a:t>[S02 · 선수 학습 확인(누가 + 무엇을 해요)]
-목적: 1학년 ‘문장으로 말하고 쓰기’(KR22-G01-KOR-SENTENCE-L01)에서 배운 ‘누가 + 무엇을 해요’로 문장을 완성하는지 확인합니다. 이 차시는 계획상 바로 앞 차시가 없으므로, 오늘 배울 문장의 짜임과 가장 가까운 이 차시의 내용을 확인합니다.
+목적: 1학년 ‘문장으로 말하고 쓰기’(KR22-G01-KOR-SENTENCE-L01)에서 배운 ‘누가 + 무엇을 해요’로 문장을 완성하는지 확인합니다. 오늘 배울 문장의 짜임과 이어지는 앞 차시의 내용을 확인합니다.
 시간: 약 3분
 이렇게 말해 보세요
 - “빈 곳에 알맞은 말을 넣어 말해 볼래? 여러 가지 답이 있어.”
